--- a/3 SECURITY RISKS OF C++ - Raamish Khan (3).pptx
+++ b/3 SECURITY RISKS OF C++ - Raamish Khan (3).pptx
@@ -905,7 +905,7 @@
           <a:p>
             <a:fld id="{D1D1EADE-8E88-4C7C-8AC5-FB148DE4940E}" type="datetime1">
               <a:rPr lang="en-US" smtClean="0"/>
-              <a:t>4/9/2026</a:t>
+              <a:t>4/15/2026</a:t>
             </a:fld>
             <a:endParaRPr lang="en-US"/>
           </a:p>
@@ -1156,7 +1156,7 @@
           <a:p>
             <a:fld id="{E31BA835-12AC-4E8F-955A-EA3F4DE2791F}" type="datetime1">
               <a:rPr lang="en-US" smtClean="0"/>
-              <a:t>4/9/2026</a:t>
+              <a:t>4/15/2026</a:t>
             </a:fld>
             <a:endParaRPr lang="en-US"/>
           </a:p>
@@ -1471,7 +1471,7 @@
           <a:p>
             <a:fld id="{E31BA835-12AC-4E8F-955A-EA3F4DE2791F}" type="datetime1">
               <a:rPr lang="en-US" smtClean="0"/>
-              <a:t>4/9/2026</a:t>
+              <a:t>4/15/2026</a:t>
             </a:fld>
             <a:endParaRPr lang="en-US"/>
           </a:p>
@@ -1813,7 +1813,7 @@
           <a:p>
             <a:fld id="{E31BA835-12AC-4E8F-955A-EA3F4DE2791F}" type="datetime1">
               <a:rPr lang="en-US" smtClean="0"/>
-              <a:t>4/9/2026</a:t>
+              <a:t>4/15/2026</a:t>
             </a:fld>
             <a:endParaRPr lang="en-US"/>
           </a:p>
@@ -2128,7 +2128,7 @@
           <a:p>
             <a:fld id="{E31BA835-12AC-4E8F-955A-EA3F4DE2791F}" type="datetime1">
               <a:rPr lang="en-US" smtClean="0"/>
-              <a:t>4/9/2026</a:t>
+              <a:t>4/15/2026</a:t>
             </a:fld>
             <a:endParaRPr lang="en-US"/>
           </a:p>
@@ -2522,7 +2522,7 @@
           <a:p>
             <a:fld id="{E31BA835-12AC-4E8F-955A-EA3F4DE2791F}" type="datetime1">
               <a:rPr lang="en-US" smtClean="0"/>
-              <a:t>4/9/2026</a:t>
+              <a:t>4/15/2026</a:t>
             </a:fld>
             <a:endParaRPr lang="en-US"/>
           </a:p>
@@ -2693,7 +2693,7 @@
           <a:p>
             <a:fld id="{E31BA835-12AC-4E8F-955A-EA3F4DE2791F}" type="datetime1">
               <a:rPr lang="en-US" smtClean="0"/>
-              <a:t>4/9/2026</a:t>
+              <a:t>4/15/2026</a:t>
             </a:fld>
             <a:endParaRPr lang="en-US"/>
           </a:p>
@@ -2874,7 +2874,7 @@
           <a:p>
             <a:fld id="{E31BA835-12AC-4E8F-955A-EA3F4DE2791F}" type="datetime1">
               <a:rPr lang="en-US" smtClean="0"/>
-              <a:t>4/9/2026</a:t>
+              <a:t>4/15/2026</a:t>
             </a:fld>
             <a:endParaRPr lang="en-US"/>
           </a:p>
@@ -3051,7 +3051,7 @@
           <a:p>
             <a:fld id="{E31BA835-12AC-4E8F-955A-EA3F4DE2791F}" type="datetime1">
               <a:rPr lang="en-US" smtClean="0"/>
-              <a:t>4/9/2026</a:t>
+              <a:t>4/15/2026</a:t>
             </a:fld>
             <a:endParaRPr lang="en-US"/>
           </a:p>
@@ -3299,7 +3299,7 @@
           <a:p>
             <a:fld id="{E31BA835-12AC-4E8F-955A-EA3F4DE2791F}" type="datetime1">
               <a:rPr lang="en-US" smtClean="0"/>
-              <a:t>4/9/2026</a:t>
+              <a:t>4/15/2026</a:t>
             </a:fld>
             <a:endParaRPr lang="en-US"/>
           </a:p>
@@ -3532,7 +3532,7 @@
           <a:p>
             <a:fld id="{E31BA835-12AC-4E8F-955A-EA3F4DE2791F}" type="datetime1">
               <a:rPr lang="en-US" smtClean="0"/>
-              <a:t>4/9/2026</a:t>
+              <a:t>4/15/2026</a:t>
             </a:fld>
             <a:endParaRPr lang="en-US"/>
           </a:p>
@@ -3907,7 +3907,7 @@
           <a:p>
             <a:fld id="{E31BA835-12AC-4E8F-955A-EA3F4DE2791F}" type="datetime1">
               <a:rPr lang="en-US" smtClean="0"/>
-              <a:t>4/9/2026</a:t>
+              <a:t>4/15/2026</a:t>
             </a:fld>
             <a:endParaRPr lang="en-US"/>
           </a:p>
@@ -4031,7 +4031,7 @@
           <a:p>
             <a:fld id="{E31BA835-12AC-4E8F-955A-EA3F4DE2791F}" type="datetime1">
               <a:rPr lang="en-US" smtClean="0"/>
-              <a:t>4/9/2026</a:t>
+              <a:t>4/15/2026</a:t>
             </a:fld>
             <a:endParaRPr lang="en-US"/>
           </a:p>
@@ -4127,7 +4127,7 @@
           <a:p>
             <a:fld id="{E31BA835-12AC-4E8F-955A-EA3F4DE2791F}" type="datetime1">
               <a:rPr lang="en-US" smtClean="0"/>
-              <a:t>4/9/2026</a:t>
+              <a:t>4/15/2026</a:t>
             </a:fld>
             <a:endParaRPr lang="en-US"/>
           </a:p>
@@ -4383,7 +4383,7 @@
           <a:p>
             <a:fld id="{E31BA835-12AC-4E8F-955A-EA3F4DE2791F}" type="datetime1">
               <a:rPr lang="en-US" smtClean="0"/>
-              <a:t>4/9/2026</a:t>
+              <a:t>4/15/2026</a:t>
             </a:fld>
             <a:endParaRPr lang="en-US"/>
           </a:p>
@@ -4647,7 +4647,7 @@
           <a:p>
             <a:fld id="{E31BA835-12AC-4E8F-955A-EA3F4DE2791F}" type="datetime1">
               <a:rPr lang="en-US" smtClean="0"/>
-              <a:t>4/9/2026</a:t>
+              <a:t>4/15/2026</a:t>
             </a:fld>
             <a:endParaRPr lang="en-US"/>
           </a:p>
@@ -5447,7 +5447,7 @@
           <a:p>
             <a:fld id="{E31BA835-12AC-4E8F-955A-EA3F4DE2791F}" type="datetime1">
               <a:rPr lang="en-US" smtClean="0"/>
-              <a:t>4/9/2026</a:t>
+              <a:t>4/15/2026</a:t>
             </a:fld>
             <a:endParaRPr lang="en-US"/>
           </a:p>
@@ -6278,8 +6278,8 @@
         </p:nvSpPr>
         <p:spPr>
           <a:xfrm>
-            <a:off x="707152" y="1276006"/>
-            <a:ext cx="8596668" cy="3880773"/>
+            <a:off x="667824" y="1433322"/>
+            <a:ext cx="8596668" cy="4190730"/>
           </a:xfrm>
         </p:spPr>
         <p:txBody>
@@ -6289,7 +6289,7 @@
           <a:lstStyle/>
           <a:p>
             <a:r>
-              <a:rPr lang="en-US" sz="2000" dirty="0">
+              <a:rPr lang="en-US" sz="2600" dirty="0">
                 <a:solidFill>
                   <a:schemeClr val="bg1">
                     <a:lumMod val="65000"/>
@@ -6301,7 +6301,7 @@
           </a:p>
           <a:p>
             <a:r>
-              <a:rPr lang="en-US" sz="2000" dirty="0">
+              <a:rPr lang="en-US" sz="2600" dirty="0">
                 <a:solidFill>
                   <a:schemeClr val="bg1">
                     <a:lumMod val="65000"/>
@@ -6317,7 +6317,7 @@
               <a:buAutoNum type="romanLcPeriod"/>
             </a:pPr>
             <a:r>
-              <a:rPr lang="en-US" sz="2000" dirty="0">
+              <a:rPr lang="en-US" sz="2600" dirty="0">
                 <a:solidFill>
                   <a:schemeClr val="bg1">
                     <a:lumMod val="65000"/>
@@ -6333,7 +6333,7 @@
               <a:buAutoNum type="romanLcPeriod"/>
             </a:pPr>
             <a:r>
-              <a:rPr lang="en-US" sz="2000" dirty="0">
+              <a:rPr lang="en-US" sz="2600" dirty="0">
                 <a:solidFill>
                   <a:schemeClr val="bg1">
                     <a:lumMod val="65000"/>
@@ -6341,48 +6341,6 @@
                 </a:solidFill>
               </a:rPr>
               <a:t>If it points to a function, it can cause the unintentional execution of an arbitrary function </a:t>
-            </a:r>
-          </a:p>
-          <a:p>
-            <a:pPr marL="457200" indent="-400050"/>
-            <a:r>
-              <a:rPr lang="en-US" sz="2000" dirty="0">
-                <a:solidFill>
-                  <a:schemeClr val="bg1">
-                    <a:lumMod val="65000"/>
-                  </a:schemeClr>
-                </a:solidFill>
-              </a:rPr>
-              <a:t>Pointers are also vulnerable to null pointer dereferencing attacks, which can lead to program reliability issues</a:t>
-            </a:r>
-          </a:p>
-          <a:p>
-            <a:pPr marL="457200" indent="-400050"/>
-            <a:r>
-              <a:rPr lang="en-US" sz="2000" dirty="0">
-                <a:solidFill>
-                  <a:schemeClr val="bg1">
-                    <a:lumMod val="65000"/>
-                  </a:schemeClr>
-                </a:solidFill>
-              </a:rPr>
-              <a:t>An attacker can take advantage of this by enforcing a null pointer dereference:</a:t>
-            </a:r>
-          </a:p>
-          <a:p>
-            <a:pPr marL="857250" lvl="1" indent="-400050">
-              <a:buFont typeface="+mj-lt"/>
-              <a:buAutoNum type="romanLcPeriod"/>
-            </a:pPr>
-            <a:r>
-              <a:rPr lang="en-US" sz="2000" dirty="0">
-                <a:solidFill>
-                  <a:schemeClr val="bg1">
-                    <a:lumMod val="65000"/>
-                  </a:schemeClr>
-                </a:solidFill>
-              </a:rPr>
-              <a:t>Can bypass some security checks or reveal debugging information</a:t>
             </a:r>
           </a:p>
         </p:txBody>
@@ -7375,12 +7333,14 @@
         </p:nvSpPr>
         <p:spPr>
           <a:xfrm>
-            <a:off x="935751" y="1781313"/>
-            <a:ext cx="8596668" cy="2679768"/>
+            <a:off x="896422" y="1535506"/>
+            <a:ext cx="8596668" cy="4118042"/>
           </a:xfrm>
         </p:spPr>
         <p:txBody>
-          <a:bodyPr/>
+          <a:bodyPr>
+            <a:normAutofit lnSpcReduction="10000"/>
+          </a:bodyPr>
           <a:lstStyle/>
           <a:p>
             <a:r>
@@ -7393,6 +7353,98 @@
               </a:rPr>
               <a:t>As we can see, the pointer is left uninitialized, which means that a random value is assigned to it, and the check will pass, as it may be a non-null value</a:t>
             </a:r>
+          </a:p>
+          <a:p>
+            <a:r>
+              <a:rPr lang="en-US" sz="2600" dirty="0">
+                <a:solidFill>
+                  <a:schemeClr val="bg1">
+                    <a:lumMod val="65000"/>
+                  </a:schemeClr>
+                </a:solidFill>
+              </a:rPr>
+              <a:t>Pointers are also vulnerable to null pointer dereferencing attacks, which can lead to program reliability issues</a:t>
+            </a:r>
+          </a:p>
+          <a:p>
+            <a:r>
+              <a:rPr lang="en-US" sz="2600" dirty="0">
+                <a:solidFill>
+                  <a:schemeClr val="bg1">
+                    <a:lumMod val="65000"/>
+                  </a:schemeClr>
+                </a:solidFill>
+              </a:rPr>
+              <a:t>An attacker can take advantage of this by enforcing a null pointer dereference:</a:t>
+            </a:r>
+          </a:p>
+          <a:p>
+            <a:pPr marL="971550" lvl="1" indent="-571500">
+              <a:buFont typeface="+mj-lt"/>
+              <a:buAutoNum type="romanLcPeriod"/>
+            </a:pPr>
+            <a:r>
+              <a:rPr lang="en-US" sz="2600" dirty="0">
+                <a:solidFill>
+                  <a:schemeClr val="bg1">
+                    <a:lumMod val="65000"/>
+                  </a:schemeClr>
+                </a:solidFill>
+              </a:rPr>
+              <a:t>Can bypass some security checks or reveal debugging information</a:t>
+            </a:r>
+            <a:endParaRPr lang="en-US" sz="2400" dirty="0">
+              <a:solidFill>
+                <a:schemeClr val="bg1">
+                  <a:lumMod val="65000"/>
+                </a:schemeClr>
+              </a:solidFill>
+            </a:endParaRPr>
+          </a:p>
+          <a:p>
+            <a:pPr marL="971550" lvl="1" indent="-571500">
+              <a:buFont typeface="+mj-lt"/>
+              <a:buAutoNum type="romanLcPeriod"/>
+            </a:pPr>
+            <a:endParaRPr lang="en-US" sz="2400" dirty="0">
+              <a:solidFill>
+                <a:schemeClr val="bg1">
+                  <a:lumMod val="65000"/>
+                </a:schemeClr>
+              </a:solidFill>
+            </a:endParaRPr>
+          </a:p>
+          <a:p>
+            <a:endParaRPr lang="en-US" sz="2600" dirty="0">
+              <a:solidFill>
+                <a:schemeClr val="bg1">
+                  <a:lumMod val="65000"/>
+                </a:schemeClr>
+              </a:solidFill>
+            </a:endParaRPr>
+          </a:p>
+          <a:p>
+            <a:endParaRPr lang="en-US" sz="2600" dirty="0">
+              <a:solidFill>
+                <a:schemeClr val="bg1">
+                  <a:lumMod val="65000"/>
+                </a:schemeClr>
+              </a:solidFill>
+            </a:endParaRPr>
+          </a:p>
+          <a:p>
+            <a:pPr marL="0" indent="0">
+              <a:buNone/>
+            </a:pPr>
+            <a:endParaRPr lang="en-US" sz="2600" dirty="0">
+              <a:solidFill>
+                <a:schemeClr val="bg1">
+                  <a:lumMod val="65000"/>
+                </a:schemeClr>
+              </a:solidFill>
+            </a:endParaRPr>
+          </a:p>
+          <a:p>
             <a:endParaRPr lang="en-US" dirty="0">
               <a:solidFill>
                 <a:schemeClr val="bg1">
